--- a/corpus/pptx/deck-groups-table.pptx
+++ b/corpus/pptx/deck-groups-table.pptx
@@ -64,7 +64,7 @@
         <p:txBody>
           <a:bodyPr/>
           <a:p>
-            <a:fld id="{7D84CE27-2E7E-4A4E-8685-53B5B9B70340}" type="slidenum">
+            <a:fld id="{8A2EEFE4-38E1-4EB7-8915-8B761827781C}" type="slidenum">
               <a:t>&lt;#&gt;</a:t>
             </a:fld>
           </a:p>
@@ -115,7 +115,7 @@
       </p:grpSpPr>
       <p:sp>
         <p:nvSpPr>
-          <p:cNvPr id="7" name="PlaceHolder 1"/>
+          <p:cNvPr id="5" name="PlaceHolder 1"/>
           <p:cNvSpPr>
             <a:spLocks noGrp="1"/>
           </p:cNvSpPr>
@@ -137,27 +137,25 @@
           </a:ln>
         </p:spPr>
         <p:txBody>
-          <a:bodyPr lIns="0" tIns="0" rIns="0" bIns="0" anchor="ctr">
-            <a:spAutoFit/>
+          <a:bodyPr lIns="0" rIns="0" tIns="0" bIns="0" anchor="ctr">
+            <a:noAutofit/>
           </a:bodyPr>
           <a:p>
             <a:pPr indent="0" algn="ctr">
               <a:buNone/>
             </a:pPr>
-            <a:endParaRPr lang="en-US" sz="4400" b="0" u="none" strike="noStrike">
-              <a:solidFill>
-                <a:srgbClr val="000000"/>
-              </a:solidFill>
-              <a:effectLst/>
-              <a:uFillTx/>
-              <a:latin typeface="Arial"/>
-            </a:endParaRPr>
-          </a:p>
-        </p:txBody>
-      </p:sp>
-      <p:sp>
-        <p:nvSpPr>
-          <p:cNvPr id="8" name="PlaceHolder 2"/>
+            <a:endParaRPr b="0" lang="en-US" sz="4400" spc="-1" strike="noStrike">
+              <a:solidFill>
+                <a:srgbClr val="000000"/>
+              </a:solidFill>
+              <a:latin typeface="Arial"/>
+            </a:endParaRPr>
+          </a:p>
+        </p:txBody>
+      </p:sp>
+      <p:sp>
+        <p:nvSpPr>
+          <p:cNvPr id="6" name="PlaceHolder 2"/>
           <p:cNvSpPr>
             <a:spLocks noGrp="1"/>
           </p:cNvSpPr>
@@ -179,19 +177,17 @@
           </a:ln>
         </p:spPr>
         <p:txBody>
-          <a:bodyPr lIns="0" tIns="0" rIns="0" bIns="0" anchor="ctr">
-            <a:spAutoFit/>
+          <a:bodyPr lIns="0" rIns="0" tIns="0" bIns="0" anchor="ctr">
+            <a:noAutofit/>
           </a:bodyPr>
           <a:p>
             <a:pPr indent="0" algn="ctr">
               <a:buNone/>
             </a:pPr>
-            <a:endParaRPr lang="en-US" sz="3200" b="0" u="none" strike="noStrike">
-              <a:solidFill>
-                <a:srgbClr val="000000"/>
-              </a:solidFill>
-              <a:effectLst/>
-              <a:uFillTx/>
+            <a:endParaRPr b="0" lang="en-US" sz="3200" spc="-1" strike="noStrike">
+              <a:solidFill>
+                <a:srgbClr val="000000"/>
+              </a:solidFill>
               <a:latin typeface="Arial"/>
             </a:endParaRPr>
           </a:p>
@@ -231,7 +227,7 @@
         <p:txBody>
           <a:bodyPr/>
           <a:p>
-            <a:fld id="{1FCBD864-1FC9-4A68-912B-8A2BDD3B479B}" type="slidenum">
+            <a:fld id="{CA6D1FE1-AC41-44C5-9B63-5C59CC78652C}" type="slidenum">
               <a:t>&lt;#&gt;</a:t>
             </a:fld>
           </a:p>
@@ -282,7 +278,7 @@
       </p:grpSpPr>
       <p:sp>
         <p:nvSpPr>
-          <p:cNvPr id="2" name="PlaceHolder 1"/>
+          <p:cNvPr id="0" name="PlaceHolder 1"/>
           <p:cNvSpPr>
             <a:spLocks noGrp="1"/>
           </p:cNvSpPr>
@@ -304,51 +300,34 @@
           </a:ln>
         </p:spPr>
         <p:txBody>
-          <a:bodyPr lIns="0" tIns="0" rIns="0" bIns="0" anchor="ctr">
+          <a:bodyPr lIns="0" rIns="0" tIns="0" bIns="0" anchor="ctr">
             <a:noAutofit/>
           </a:bodyPr>
-          <a:lstStyle>
-            <a:lvl1pPr indent="0" algn="ctr">
-              <a:buNone/>
-              <a:defRPr lang="en-US" sz="4400" b="0" u="none" strike="noStrike">
-                <a:solidFill>
-                  <a:srgbClr val="000000"/>
-                </a:solidFill>
-                <a:effectLst/>
-                <a:uFillTx/>
-                <a:latin typeface="Arial"/>
-              </a:defRPr>
-            </a:lvl1pPr>
-          </a:lstStyle>
           <a:p>
             <a:pPr indent="0" algn="ctr">
               <a:buNone/>
             </a:pPr>
             <a:r>
-              <a:rPr lang="en-US" sz="4400" b="0" u="none" strike="noStrike">
-                <a:solidFill>
-                  <a:srgbClr val="000000"/>
-                </a:solidFill>
-                <a:effectLst/>
-                <a:uFillTx/>
+              <a:rPr b="0" lang="en-US" sz="4400" spc="-1" strike="noStrike">
+                <a:solidFill>
+                  <a:srgbClr val="000000"/>
+                </a:solidFill>
                 <a:latin typeface="Arial"/>
               </a:rPr>
               <a:t>Click to edit the title text format</a:t>
             </a:r>
-            <a:endParaRPr lang="en-US" sz="4400" b="0" u="none" strike="noStrike">
-              <a:solidFill>
-                <a:srgbClr val="000000"/>
-              </a:solidFill>
-              <a:effectLst/>
-              <a:uFillTx/>
-              <a:latin typeface="Arial"/>
-            </a:endParaRPr>
-          </a:p>
-        </p:txBody>
-      </p:sp>
-      <p:sp>
-        <p:nvSpPr>
-          <p:cNvPr id="3" name="PlaceHolder 2"/>
+            <a:endParaRPr b="0" lang="en-US" sz="4400" spc="-1" strike="noStrike">
+              <a:solidFill>
+                <a:srgbClr val="000000"/>
+              </a:solidFill>
+              <a:latin typeface="Arial"/>
+            </a:endParaRPr>
+          </a:p>
+        </p:txBody>
+      </p:sp>
+      <p:sp>
+        <p:nvSpPr>
+          <p:cNvPr id="1" name="PlaceHolder 2"/>
           <p:cNvSpPr>
             <a:spLocks noGrp="1"/>
           </p:cNvSpPr>
@@ -370,11 +349,11 @@
           </a:ln>
         </p:spPr>
         <p:txBody>
-          <a:bodyPr lIns="0" tIns="0" rIns="0" bIns="0" anchor="t">
+          <a:bodyPr lIns="0" rIns="0" tIns="0" bIns="0" anchor="t">
             <a:normAutofit/>
           </a:bodyPr>
-          <a:lstStyle>
-            <a:lvl1pPr algn="l">
+          <a:p>
+            <a:pPr marL="432000" indent="-324000">
               <a:spcBef>
                 <a:spcPts val="1417"/>
               </a:spcBef>
@@ -384,16 +363,25 @@
               <a:buSzPct val="45000"/>
               <a:buFont typeface="Wingdings" charset="2"/>
               <a:buChar char=""/>
-              <a:defRPr lang="en-US" sz="3200" b="0" u="none" strike="noStrike">
-                <a:solidFill>
-                  <a:srgbClr val="000000"/>
-                </a:solidFill>
-                <a:effectLst/>
-                <a:uFillTx/>
-                <a:latin typeface="Arial"/>
-              </a:defRPr>
-            </a:lvl1pPr>
-            <a:lvl2pPr lvl="1" algn="l">
+            </a:pPr>
+            <a:r>
+              <a:rPr b="0" lang="en-US" sz="3200" spc="-1" strike="noStrike">
+                <a:solidFill>
+                  <a:srgbClr val="000000"/>
+                </a:solidFill>
+                <a:latin typeface="Arial"/>
+              </a:rPr>
+              <a:t>Click to edit the outline text format</a:t>
+            </a:r>
+            <a:endParaRPr b="0" lang="en-US" sz="3200" spc="-1" strike="noStrike">
+              <a:solidFill>
+                <a:srgbClr val="000000"/>
+              </a:solidFill>
+              <a:latin typeface="Arial"/>
+            </a:endParaRPr>
+          </a:p>
+          <a:p>
+            <a:pPr lvl="1" marL="864000" indent="-324000">
               <a:spcBef>
                 <a:spcPts val="1134"/>
               </a:spcBef>
@@ -403,16 +391,25 @@
               <a:buSzPct val="75000"/>
               <a:buFont typeface="Symbol" charset="2"/>
               <a:buChar char=""/>
-              <a:defRPr lang="en-US" sz="2800" b="0" u="none" strike="noStrike">
-                <a:solidFill>
-                  <a:srgbClr val="000000"/>
-                </a:solidFill>
-                <a:effectLst/>
-                <a:uFillTx/>
-                <a:latin typeface="Arial"/>
-              </a:defRPr>
-            </a:lvl2pPr>
-            <a:lvl3pPr lvl="2" algn="l">
+            </a:pPr>
+            <a:r>
+              <a:rPr b="0" lang="en-US" sz="2800" spc="-1" strike="noStrike">
+                <a:solidFill>
+                  <a:srgbClr val="000000"/>
+                </a:solidFill>
+                <a:latin typeface="Arial"/>
+              </a:rPr>
+              <a:t>Second Outline Level</a:t>
+            </a:r>
+            <a:endParaRPr b="0" lang="en-US" sz="2800" spc="-1" strike="noStrike">
+              <a:solidFill>
+                <a:srgbClr val="000000"/>
+              </a:solidFill>
+              <a:latin typeface="Arial"/>
+            </a:endParaRPr>
+          </a:p>
+          <a:p>
+            <a:pPr lvl="2" marL="1296000" indent="-288000">
               <a:spcBef>
                 <a:spcPts val="850"/>
               </a:spcBef>
@@ -422,16 +419,25 @@
               <a:buSzPct val="45000"/>
               <a:buFont typeface="Wingdings" charset="2"/>
               <a:buChar char=""/>
-              <a:defRPr lang="en-US" sz="2400" b="0" u="none" strike="noStrike">
-                <a:solidFill>
-                  <a:srgbClr val="000000"/>
-                </a:solidFill>
-                <a:effectLst/>
-                <a:uFillTx/>
-                <a:latin typeface="Arial"/>
-              </a:defRPr>
-            </a:lvl3pPr>
-            <a:lvl4pPr lvl="3" algn="l">
+            </a:pPr>
+            <a:r>
+              <a:rPr b="0" lang="en-US" sz="2400" spc="-1" strike="noStrike">
+                <a:solidFill>
+                  <a:srgbClr val="000000"/>
+                </a:solidFill>
+                <a:latin typeface="Arial"/>
+              </a:rPr>
+              <a:t>Third Outline Level</a:t>
+            </a:r>
+            <a:endParaRPr b="0" lang="en-US" sz="2400" spc="-1" strike="noStrike">
+              <a:solidFill>
+                <a:srgbClr val="000000"/>
+              </a:solidFill>
+              <a:latin typeface="Arial"/>
+            </a:endParaRPr>
+          </a:p>
+          <a:p>
+            <a:pPr lvl="3" marL="1728000" indent="-216000">
               <a:spcBef>
                 <a:spcPts val="567"/>
               </a:spcBef>
@@ -441,16 +447,25 @@
               <a:buSzPct val="75000"/>
               <a:buFont typeface="Symbol" charset="2"/>
               <a:buChar char=""/>
-              <a:defRPr lang="en-US" sz="2000" b="0" u="none" strike="noStrike">
-                <a:solidFill>
-                  <a:srgbClr val="000000"/>
-                </a:solidFill>
-                <a:effectLst/>
-                <a:uFillTx/>
-                <a:latin typeface="Arial"/>
-              </a:defRPr>
-            </a:lvl4pPr>
-            <a:lvl5pPr lvl="4" algn="l">
+            </a:pPr>
+            <a:r>
+              <a:rPr b="0" lang="en-US" sz="2000" spc="-1" strike="noStrike">
+                <a:solidFill>
+                  <a:srgbClr val="000000"/>
+                </a:solidFill>
+                <a:latin typeface="Arial"/>
+              </a:rPr>
+              <a:t>Fourth Outline Level</a:t>
+            </a:r>
+            <a:endParaRPr b="0" lang="en-US" sz="2000" spc="-1" strike="noStrike">
+              <a:solidFill>
+                <a:srgbClr val="000000"/>
+              </a:solidFill>
+              <a:latin typeface="Arial"/>
+            </a:endParaRPr>
+          </a:p>
+          <a:p>
+            <a:pPr lvl="4" marL="2160000" indent="-216000">
               <a:spcBef>
                 <a:spcPts val="283"/>
               </a:spcBef>
@@ -460,16 +475,25 @@
               <a:buSzPct val="45000"/>
               <a:buFont typeface="Wingdings" charset="2"/>
               <a:buChar char=""/>
-              <a:defRPr lang="en-US" sz="2000" b="0" u="none" strike="noStrike">
-                <a:solidFill>
-                  <a:srgbClr val="000000"/>
-                </a:solidFill>
-                <a:effectLst/>
-                <a:uFillTx/>
-                <a:latin typeface="Arial"/>
-              </a:defRPr>
-            </a:lvl5pPr>
-            <a:lvl6pPr lvl="5" algn="l">
+            </a:pPr>
+            <a:r>
+              <a:rPr b="0" lang="en-US" sz="2000" spc="-1" strike="noStrike">
+                <a:solidFill>
+                  <a:srgbClr val="000000"/>
+                </a:solidFill>
+                <a:latin typeface="Arial"/>
+              </a:rPr>
+              <a:t>Fifth Outline Level</a:t>
+            </a:r>
+            <a:endParaRPr b="0" lang="en-US" sz="2000" spc="-1" strike="noStrike">
+              <a:solidFill>
+                <a:srgbClr val="000000"/>
+              </a:solidFill>
+              <a:latin typeface="Arial"/>
+            </a:endParaRPr>
+          </a:p>
+          <a:p>
+            <a:pPr lvl="5" marL="2592000" indent="-216000">
               <a:spcBef>
                 <a:spcPts val="283"/>
               </a:spcBef>
@@ -479,16 +503,25 @@
               <a:buSzPct val="45000"/>
               <a:buFont typeface="Wingdings" charset="2"/>
               <a:buChar char=""/>
-              <a:defRPr lang="en-US" sz="2000" b="0" u="none" strike="noStrike">
-                <a:solidFill>
-                  <a:srgbClr val="000000"/>
-                </a:solidFill>
-                <a:effectLst/>
-                <a:uFillTx/>
-                <a:latin typeface="Arial"/>
-              </a:defRPr>
-            </a:lvl6pPr>
-            <a:lvl7pPr lvl="6" algn="l">
+            </a:pPr>
+            <a:r>
+              <a:rPr b="0" lang="en-US" sz="2000" spc="-1" strike="noStrike">
+                <a:solidFill>
+                  <a:srgbClr val="000000"/>
+                </a:solidFill>
+                <a:latin typeface="Arial"/>
+              </a:rPr>
+              <a:t>Sixth Outline Level</a:t>
+            </a:r>
+            <a:endParaRPr b="0" lang="en-US" sz="2000" spc="-1" strike="noStrike">
+              <a:solidFill>
+                <a:srgbClr val="000000"/>
+              </a:solidFill>
+              <a:latin typeface="Arial"/>
+            </a:endParaRPr>
+          </a:p>
+          <a:p>
+            <a:pPr lvl="6" marL="3024000" indent="-216000">
               <a:spcBef>
                 <a:spcPts val="283"/>
               </a:spcBef>
@@ -498,245 +531,28 @@
               <a:buSzPct val="45000"/>
               <a:buFont typeface="Wingdings" charset="2"/>
               <a:buChar char=""/>
-              <a:defRPr lang="en-US" sz="2000" b="0" u="none" strike="noStrike">
-                <a:solidFill>
-                  <a:srgbClr val="000000"/>
-                </a:solidFill>
-                <a:effectLst/>
-                <a:uFillTx/>
-                <a:latin typeface="Arial"/>
-              </a:defRPr>
-            </a:lvl7pPr>
-          </a:lstStyle>
-          <a:p>
-            <a:pPr marL="432000" indent="-324000" algn="l">
-              <a:spcBef>
-                <a:spcPts val="1417"/>
-              </a:spcBef>
-              <a:buClr>
-                <a:srgbClr val="000000"/>
-              </a:buClr>
-              <a:buSzPct val="45000"/>
-              <a:buFont typeface="Wingdings" charset="2"/>
-              <a:buChar char=""/>
-            </a:pPr>
-            <a:r>
-              <a:rPr lang="en-US" sz="3200" b="0" u="none" strike="noStrike">
-                <a:solidFill>
-                  <a:srgbClr val="000000"/>
-                </a:solidFill>
-                <a:effectLst/>
-                <a:uFillTx/>
-                <a:latin typeface="Arial"/>
-              </a:rPr>
-              <a:t>Click to edit the outline text format</a:t>
-            </a:r>
-            <a:endParaRPr lang="en-US" sz="3200" b="0" u="none" strike="noStrike">
-              <a:solidFill>
-                <a:srgbClr val="000000"/>
-              </a:solidFill>
-              <a:effectLst/>
-              <a:uFillTx/>
-              <a:latin typeface="Arial"/>
-            </a:endParaRPr>
-          </a:p>
-          <a:p>
-            <a:pPr marL="864000" lvl="1" indent="-324000" algn="l">
-              <a:spcBef>
-                <a:spcPts val="1134"/>
-              </a:spcBef>
-              <a:buClr>
-                <a:srgbClr val="000000"/>
-              </a:buClr>
-              <a:buSzPct val="75000"/>
-              <a:buFont typeface="Symbol" charset="2"/>
-              <a:buChar char=""/>
-            </a:pPr>
-            <a:r>
-              <a:rPr lang="en-US" sz="2800" b="0" u="none" strike="noStrike">
-                <a:solidFill>
-                  <a:srgbClr val="000000"/>
-                </a:solidFill>
-                <a:effectLst/>
-                <a:uFillTx/>
-                <a:latin typeface="Arial"/>
-              </a:rPr>
-              <a:t>Second Outline Level</a:t>
-            </a:r>
-            <a:endParaRPr lang="en-US" sz="2800" b="0" u="none" strike="noStrike">
-              <a:solidFill>
-                <a:srgbClr val="000000"/>
-              </a:solidFill>
-              <a:effectLst/>
-              <a:uFillTx/>
-              <a:latin typeface="Arial"/>
-            </a:endParaRPr>
-          </a:p>
-          <a:p>
-            <a:pPr marL="1296000" lvl="2" indent="-288000" algn="l">
-              <a:spcBef>
-                <a:spcPts val="850"/>
-              </a:spcBef>
-              <a:buClr>
-                <a:srgbClr val="000000"/>
-              </a:buClr>
-              <a:buSzPct val="45000"/>
-              <a:buFont typeface="Wingdings" charset="2"/>
-              <a:buChar char=""/>
-            </a:pPr>
-            <a:r>
-              <a:rPr lang="en-US" sz="2400" b="0" u="none" strike="noStrike">
-                <a:solidFill>
-                  <a:srgbClr val="000000"/>
-                </a:solidFill>
-                <a:effectLst/>
-                <a:uFillTx/>
-                <a:latin typeface="Arial"/>
-              </a:rPr>
-              <a:t>Third Outline Level</a:t>
-            </a:r>
-            <a:endParaRPr lang="en-US" sz="2400" b="0" u="none" strike="noStrike">
-              <a:solidFill>
-                <a:srgbClr val="000000"/>
-              </a:solidFill>
-              <a:effectLst/>
-              <a:uFillTx/>
-              <a:latin typeface="Arial"/>
-            </a:endParaRPr>
-          </a:p>
-          <a:p>
-            <a:pPr marL="1728000" lvl="3" indent="-216000" algn="l">
-              <a:spcBef>
-                <a:spcPts val="567"/>
-              </a:spcBef>
-              <a:buClr>
-                <a:srgbClr val="000000"/>
-              </a:buClr>
-              <a:buSzPct val="75000"/>
-              <a:buFont typeface="Symbol" charset="2"/>
-              <a:buChar char=""/>
-            </a:pPr>
-            <a:r>
-              <a:rPr lang="en-US" sz="2000" b="0" u="none" strike="noStrike">
-                <a:solidFill>
-                  <a:srgbClr val="000000"/>
-                </a:solidFill>
-                <a:effectLst/>
-                <a:uFillTx/>
-                <a:latin typeface="Arial"/>
-              </a:rPr>
-              <a:t>Fourth Outline Level</a:t>
-            </a:r>
-            <a:endParaRPr lang="en-US" sz="2000" b="0" u="none" strike="noStrike">
-              <a:solidFill>
-                <a:srgbClr val="000000"/>
-              </a:solidFill>
-              <a:effectLst/>
-              <a:uFillTx/>
-              <a:latin typeface="Arial"/>
-            </a:endParaRPr>
-          </a:p>
-          <a:p>
-            <a:pPr marL="2160000" lvl="4" indent="-216000" algn="l">
-              <a:spcBef>
-                <a:spcPts val="283"/>
-              </a:spcBef>
-              <a:buClr>
-                <a:srgbClr val="000000"/>
-              </a:buClr>
-              <a:buSzPct val="45000"/>
-              <a:buFont typeface="Wingdings" charset="2"/>
-              <a:buChar char=""/>
-            </a:pPr>
-            <a:r>
-              <a:rPr lang="en-US" sz="2000" b="0" u="none" strike="noStrike">
-                <a:solidFill>
-                  <a:srgbClr val="000000"/>
-                </a:solidFill>
-                <a:effectLst/>
-                <a:uFillTx/>
-                <a:latin typeface="Arial"/>
-              </a:rPr>
-              <a:t>Fifth Outline Level</a:t>
-            </a:r>
-            <a:endParaRPr lang="en-US" sz="2000" b="0" u="none" strike="noStrike">
-              <a:solidFill>
-                <a:srgbClr val="000000"/>
-              </a:solidFill>
-              <a:effectLst/>
-              <a:uFillTx/>
-              <a:latin typeface="Arial"/>
-            </a:endParaRPr>
-          </a:p>
-          <a:p>
-            <a:pPr marL="2592000" lvl="5" indent="-216000" algn="l">
-              <a:spcBef>
-                <a:spcPts val="283"/>
-              </a:spcBef>
-              <a:buClr>
-                <a:srgbClr val="000000"/>
-              </a:buClr>
-              <a:buSzPct val="45000"/>
-              <a:buFont typeface="Wingdings" charset="2"/>
-              <a:buChar char=""/>
-            </a:pPr>
-            <a:r>
-              <a:rPr lang="en-US" sz="2000" b="0" u="none" strike="noStrike">
-                <a:solidFill>
-                  <a:srgbClr val="000000"/>
-                </a:solidFill>
-                <a:effectLst/>
-                <a:uFillTx/>
-                <a:latin typeface="Arial"/>
-              </a:rPr>
-              <a:t>Sixth Outline Level</a:t>
-            </a:r>
-            <a:endParaRPr lang="en-US" sz="2000" b="0" u="none" strike="noStrike">
-              <a:solidFill>
-                <a:srgbClr val="000000"/>
-              </a:solidFill>
-              <a:effectLst/>
-              <a:uFillTx/>
-              <a:latin typeface="Arial"/>
-            </a:endParaRPr>
-          </a:p>
-          <a:p>
-            <a:pPr marL="3024000" lvl="6" indent="-216000" algn="l">
-              <a:spcBef>
-                <a:spcPts val="283"/>
-              </a:spcBef>
-              <a:buClr>
-                <a:srgbClr val="000000"/>
-              </a:buClr>
-              <a:buSzPct val="45000"/>
-              <a:buFont typeface="Wingdings" charset="2"/>
-              <a:buChar char=""/>
-            </a:pPr>
-            <a:r>
-              <a:rPr lang="en-US" sz="2000" b="0" u="none" strike="noStrike">
-                <a:solidFill>
-                  <a:srgbClr val="000000"/>
-                </a:solidFill>
-                <a:effectLst/>
-                <a:uFillTx/>
+            </a:pPr>
+            <a:r>
+              <a:rPr b="0" lang="en-US" sz="2000" spc="-1" strike="noStrike">
+                <a:solidFill>
+                  <a:srgbClr val="000000"/>
+                </a:solidFill>
                 <a:latin typeface="Arial"/>
               </a:rPr>
               <a:t>Seventh Outline Level</a:t>
             </a:r>
-            <a:endParaRPr lang="en-US" sz="2000" b="0" u="none" strike="noStrike">
-              <a:solidFill>
-                <a:srgbClr val="000000"/>
-              </a:solidFill>
-              <a:effectLst/>
-              <a:uFillTx/>
-              <a:latin typeface="Arial"/>
-            </a:endParaRPr>
-          </a:p>
-        </p:txBody>
-      </p:sp>
-      <p:sp>
-        <p:nvSpPr>
-          <p:cNvPr id="4" name="PlaceHolder 3"/>
+            <a:endParaRPr b="0" lang="en-US" sz="2000" spc="-1" strike="noStrike">
+              <a:solidFill>
+                <a:srgbClr val="000000"/>
+              </a:solidFill>
+              <a:latin typeface="Arial"/>
+            </a:endParaRPr>
+          </a:p>
+        </p:txBody>
+      </p:sp>
+      <p:sp>
+        <p:nvSpPr>
+          <p:cNvPr id="2" name="PlaceHolder 3"/>
           <p:cNvSpPr>
             <a:spLocks noGrp="1"/>
           </p:cNvSpPr>
@@ -758,43 +574,37 @@
           </a:ln>
         </p:spPr>
         <p:txBody>
-          <a:bodyPr lIns="0" tIns="0" rIns="0" bIns="0" anchor="t">
+          <a:bodyPr lIns="0" rIns="0" tIns="0" bIns="0" anchor="t">
             <a:noAutofit/>
           </a:bodyPr>
           <a:lstStyle>
-            <a:lvl1pPr indent="0" algn="l">
+            <a:lvl1pPr indent="0">
               <a:buNone/>
-              <a:defRPr lang="en-US" sz="1400" b="0" u="none" strike="noStrike">
-                <a:solidFill>
-                  <a:srgbClr val="000000"/>
-                </a:solidFill>
-                <a:effectLst/>
-                <a:uFillTx/>
+              <a:defRPr b="0" lang="en-US" sz="1400" spc="-1" strike="noStrike">
+                <a:solidFill>
+                  <a:srgbClr val="000000"/>
+                </a:solidFill>
                 <a:latin typeface="Times New Roman"/>
               </a:defRPr>
             </a:lvl1pPr>
           </a:lstStyle>
           <a:p>
-            <a:pPr indent="0" algn="l">
+            <a:pPr indent="0">
               <a:buNone/>
             </a:pPr>
             <a:r>
-              <a:rPr lang="en-US" sz="1400" b="0" u="none" strike="noStrike">
-                <a:solidFill>
-                  <a:srgbClr val="000000"/>
-                </a:solidFill>
-                <a:effectLst/>
-                <a:uFillTx/>
+              <a:rPr b="0" lang="en-US" sz="1400" spc="-1" strike="noStrike">
+                <a:solidFill>
+                  <a:srgbClr val="000000"/>
+                </a:solidFill>
                 <a:latin typeface="Times New Roman"/>
               </a:rPr>
               <a:t>&lt;date/time&gt;</a:t>
             </a:r>
-            <a:endParaRPr lang="en-US" sz="1400" b="0" u="none" strike="noStrike">
-              <a:solidFill>
-                <a:srgbClr val="000000"/>
-              </a:solidFill>
-              <a:effectLst/>
-              <a:uFillTx/>
+            <a:endParaRPr b="0" lang="en-US" sz="1400" spc="-1" strike="noStrike">
+              <a:solidFill>
+                <a:srgbClr val="000000"/>
+              </a:solidFill>
               <a:latin typeface="Times New Roman"/>
             </a:endParaRPr>
           </a:p>
@@ -802,7 +612,7 @@
       </p:sp>
       <p:sp>
         <p:nvSpPr>
-          <p:cNvPr id="5" name="PlaceHolder 4"/>
+          <p:cNvPr id="3" name="PlaceHolder 4"/>
           <p:cNvSpPr>
             <a:spLocks noGrp="1"/>
           </p:cNvSpPr>
@@ -824,18 +634,16 @@
           </a:ln>
         </p:spPr>
         <p:txBody>
-          <a:bodyPr lIns="0" tIns="0" rIns="0" bIns="0" anchor="t">
+          <a:bodyPr lIns="0" rIns="0" tIns="0" bIns="0" anchor="t">
             <a:noAutofit/>
           </a:bodyPr>
           <a:lstStyle>
             <a:lvl1pPr indent="0" algn="ctr">
               <a:buNone/>
-              <a:defRPr lang="en-US" sz="1400" b="0" u="none" strike="noStrike">
-                <a:solidFill>
-                  <a:srgbClr val="000000"/>
-                </a:solidFill>
-                <a:effectLst/>
-                <a:uFillTx/>
+              <a:defRPr b="0" lang="en-US" sz="1400" spc="-1" strike="noStrike">
+                <a:solidFill>
+                  <a:srgbClr val="000000"/>
+                </a:solidFill>
                 <a:latin typeface="Times New Roman"/>
               </a:defRPr>
             </a:lvl1pPr>
@@ -845,22 +653,18 @@
               <a:buNone/>
             </a:pPr>
             <a:r>
-              <a:rPr lang="en-US" sz="1400" b="0" u="none" strike="noStrike">
-                <a:solidFill>
-                  <a:srgbClr val="000000"/>
-                </a:solidFill>
-                <a:effectLst/>
-                <a:uFillTx/>
+              <a:rPr b="0" lang="en-US" sz="1400" spc="-1" strike="noStrike">
+                <a:solidFill>
+                  <a:srgbClr val="000000"/>
+                </a:solidFill>
                 <a:latin typeface="Times New Roman"/>
               </a:rPr>
               <a:t>&lt;footer&gt;</a:t>
             </a:r>
-            <a:endParaRPr lang="en-US" sz="1400" b="0" u="none" strike="noStrike">
-              <a:solidFill>
-                <a:srgbClr val="000000"/>
-              </a:solidFill>
-              <a:effectLst/>
-              <a:uFillTx/>
+            <a:endParaRPr b="0" lang="en-US" sz="1400" spc="-1" strike="noStrike">
+              <a:solidFill>
+                <a:srgbClr val="000000"/>
+              </a:solidFill>
               <a:latin typeface="Times New Roman"/>
             </a:endParaRPr>
           </a:p>
@@ -868,7 +672,7 @@
       </p:sp>
       <p:sp>
         <p:nvSpPr>
-          <p:cNvPr id="6" name="PlaceHolder 5"/>
+          <p:cNvPr id="4" name="PlaceHolder 5"/>
           <p:cNvSpPr>
             <a:spLocks noGrp="1"/>
           </p:cNvSpPr>
@@ -890,18 +694,16 @@
           </a:ln>
         </p:spPr>
         <p:txBody>
-          <a:bodyPr lIns="0" tIns="0" rIns="0" bIns="0" anchor="t">
+          <a:bodyPr lIns="0" rIns="0" tIns="0" bIns="0" anchor="t">
             <a:noAutofit/>
           </a:bodyPr>
           <a:lstStyle>
             <a:lvl1pPr indent="0" algn="r">
               <a:buNone/>
-              <a:defRPr lang="en-US" sz="1400" b="0" u="none" strike="noStrike">
-                <a:solidFill>
-                  <a:srgbClr val="000000"/>
-                </a:solidFill>
-                <a:effectLst/>
-                <a:uFillTx/>
+              <a:defRPr b="0" lang="en-US" sz="1400" spc="-1" strike="noStrike">
+                <a:solidFill>
+                  <a:srgbClr val="000000"/>
+                </a:solidFill>
                 <a:latin typeface="Times New Roman"/>
               </a:defRPr>
             </a:lvl1pPr>
@@ -910,23 +712,19 @@
             <a:pPr indent="0" algn="r">
               <a:buNone/>
             </a:pPr>
-            <a:fld id="{2408DC7D-54AB-49C2-8ADB-C29B9FAB1810}" type="slidenum">
-              <a:rPr lang="en-US" sz="1400" b="0" u="none" strike="noStrike">
-                <a:solidFill>
-                  <a:srgbClr val="000000"/>
-                </a:solidFill>
-                <a:effectLst/>
-                <a:uFillTx/>
+            <a:fld id="{2F0B437E-8529-45E9-8028-261F8778F83E}" type="slidenum">
+              <a:rPr b="0" lang="en-US" sz="1400" spc="-1" strike="noStrike">
+                <a:solidFill>
+                  <a:srgbClr val="000000"/>
+                </a:solidFill>
                 <a:latin typeface="Times New Roman"/>
               </a:rPr>
               <a:t>&lt;number&gt;</a:t>
             </a:fld>
-            <a:endParaRPr lang="en-US" sz="1400" b="0" u="none" strike="noStrike">
-              <a:solidFill>
-                <a:srgbClr val="000000"/>
-              </a:solidFill>
-              <a:effectLst/>
-              <a:uFillTx/>
+            <a:endParaRPr b="0" lang="en-US" sz="1400" spc="-1" strike="noStrike">
+              <a:solidFill>
+                <a:srgbClr val="000000"/>
+              </a:solidFill>
               <a:latin typeface="Times New Roman"/>
             </a:endParaRPr>
           </a:p>
@@ -934,7 +732,7 @@
       </p:sp>
     </p:spTree>
   </p:cSld>
-  <p:clrMap bg1="lt1" tx1="dk1" bg2="lt2" tx2="dk2" accent1="accent1" accent2="accent2" accent3="accent3" accent4="accent4" accent5="accent5" accent6="accent6" hlink="hlink" folHlink="folHlink"/>
+  <p:clrMap bg1="lt1" bg2="lt2" tx1="dk1" tx2="dk2" accent1="accent1" accent2="accent2" accent3="accent3" accent4="accent4" accent5="accent5" accent6="accent6" hlink="hlink" folHlink="folHlink"/>
   <p:sldLayoutIdLst>
     <p:sldLayoutId id="2147483649" r:id="rId2"/>
     <p:sldLayoutId id="2147483650" r:id="rId3"/>
@@ -961,7 +759,7 @@
       </p:grpSpPr>
       <p:sp>
         <p:nvSpPr>
-          <p:cNvPr id="9" name="title"/>
+          <p:cNvPr id="7" name="title"/>
           <p:cNvSpPr txBox="1"/>
           <p:nvPr/>
         </p:nvSpPr>
@@ -974,33 +772,28 @@
             <a:avLst/>
           </a:prstGeom>
           <a:noFill/>
-          <a:ln w="38160">
+          <a:ln w="0">
             <a:noFill/>
           </a:ln>
         </p:spPr>
         <p:txBody>
-          <a:bodyPr lIns="90000" tIns="45000" rIns="90000" bIns="45000" anchor="t">
-            <a:spAutoFit/>
+          <a:bodyPr lIns="90000" rIns="90000" tIns="45000" bIns="45000" anchor="t">
+            <a:noAutofit/>
           </a:bodyPr>
           <a:p>
-            <a:pPr/>
-            <a:r>
-              <a:rPr lang="en-US" sz="3200" b="1" u="none" strike="noStrike">
-                <a:solidFill>
-                  <a:srgbClr val="000000"/>
-                </a:solidFill>
-                <a:effectLst/>
-                <a:uFillTx/>
+            <a:r>
+              <a:rPr b="1" lang="en-US" sz="3200" spc="-1" strike="noStrike">
+                <a:solidFill>
+                  <a:srgbClr val="000000"/>
+                </a:solidFill>
                 <a:latin typeface="Arial"/>
               </a:rPr>
               <a:t>Grouped Sampling Plan</a:t>
             </a:r>
-            <a:endParaRPr lang="en-US" sz="3200" b="0" u="none" strike="noStrike">
-              <a:solidFill>
-                <a:srgbClr val="000000"/>
-              </a:solidFill>
-              <a:effectLst/>
-              <a:uFillTx/>
+            <a:endParaRPr b="0" lang="en-US" sz="3200" spc="-1" strike="noStrike">
+              <a:solidFill>
+                <a:srgbClr val="000000"/>
+              </a:solidFill>
               <a:latin typeface="Arial"/>
             </a:endParaRPr>
           </a:p>
@@ -1008,7 +801,7 @@
       </p:sp>
       <p:grpSp>
         <p:nvGrpSpPr>
-          <p:cNvPr id="10" name="Stations"/>
+          <p:cNvPr id="8" name="Stations"/>
           <p:cNvGrpSpPr/>
           <p:nvPr/>
         </p:nvGrpSpPr>
@@ -1022,7 +815,7 @@
         </p:grpSpPr>
         <p:sp>
           <p:nvSpPr>
-            <p:cNvPr id="11" name="shape"/>
+            <p:cNvPr id="9" name="shape"/>
             <p:cNvSpPr txBox="1"/>
             <p:nvPr/>
           </p:nvSpPr>
@@ -1035,41 +828,32 @@
               <a:avLst/>
             </a:prstGeom>
             <a:solidFill>
-              <a:schemeClr val="accent1"/>
+              <a:srgbClr val="729fcf"/>
             </a:solidFill>
-            <a:ln w="38160">
-              <a:solidFill>
-                <a:schemeClr val="accent1">
-                  <a:lumMod val="75000"/>
-                  <a:lumOff val="0"/>
-                </a:schemeClr>
-              </a:solidFill>
-              <a:round/>
+            <a:ln w="0">
+              <a:solidFill>
+                <a:srgbClr val="3465a4"/>
+              </a:solidFill>
             </a:ln>
           </p:spPr>
           <p:txBody>
-            <a:bodyPr lIns="90000" tIns="45000" rIns="90000" bIns="45000" anchor="t">
-              <a:spAutoFit/>
+            <a:bodyPr lIns="90000" rIns="90000" tIns="45000" bIns="45000" anchor="t">
+              <a:noAutofit/>
             </a:bodyPr>
             <a:p>
-              <a:pPr/>
               <a:r>
-                <a:rPr lang="en-US" sz="1800" b="0" u="none" strike="noStrike">
+                <a:rPr b="0" lang="en-US" sz="1800" spc="-1" strike="noStrike">
                   <a:solidFill>
-                    <a:srgbClr val="FFFFFF"/>
+                    <a:srgbClr val="000000"/>
                   </a:solidFill>
-                  <a:effectLst/>
-                  <a:uFillTx/>
                   <a:latin typeface="Arial"/>
                 </a:rPr>
                 <a:t>Station group</a:t>
               </a:r>
-              <a:endParaRPr lang="en-US" sz="1800" b="0" u="none" strike="noStrike">
-                <a:solidFill>
-                  <a:srgbClr val="FFFFFF"/>
-                </a:solidFill>
-                <a:effectLst/>
-                <a:uFillTx/>
+              <a:endParaRPr b="0" lang="en-US" sz="1800" spc="-1" strike="noStrike">
+                <a:solidFill>
+                  <a:srgbClr val="000000"/>
+                </a:solidFill>
                 <a:latin typeface="Arial"/>
               </a:endParaRPr>
             </a:p>
@@ -1077,7 +861,7 @@
         </p:sp>
         <p:sp>
           <p:nvSpPr>
-            <p:cNvPr id="12" name="shape"/>
+            <p:cNvPr id="10" name="shape"/>
             <p:cNvSpPr txBox="1"/>
             <p:nvPr/>
           </p:nvSpPr>
@@ -1090,41 +874,32 @@
               <a:avLst/>
             </a:prstGeom>
             <a:solidFill>
-              <a:schemeClr val="accent1"/>
+              <a:srgbClr val="729fcf"/>
             </a:solidFill>
-            <a:ln w="38160">
-              <a:solidFill>
-                <a:schemeClr val="accent1">
-                  <a:lumMod val="75000"/>
-                  <a:lumOff val="0"/>
-                </a:schemeClr>
-              </a:solidFill>
-              <a:round/>
+            <a:ln w="0">
+              <a:solidFill>
+                <a:srgbClr val="3465a4"/>
+              </a:solidFill>
             </a:ln>
           </p:spPr>
           <p:txBody>
-            <a:bodyPr lIns="90000" tIns="45000" rIns="90000" bIns="45000" anchor="t">
-              <a:spAutoFit/>
+            <a:bodyPr lIns="90000" rIns="90000" tIns="45000" bIns="45000" anchor="t">
+              <a:noAutofit/>
             </a:bodyPr>
             <a:p>
-              <a:pPr/>
               <a:r>
-                <a:rPr lang="en-US" sz="1800" b="0" u="none" strike="noStrike">
+                <a:rPr b="0" lang="en-US" sz="1800" spc="-1" strike="noStrike">
                   <a:solidFill>
-                    <a:srgbClr val="FFFFFF"/>
+                    <a:srgbClr val="000000"/>
                   </a:solidFill>
-                  <a:effectLst/>
-                  <a:uFillTx/>
                   <a:latin typeface="Arial"/>
                 </a:rPr>
                 <a:t>North station</a:t>
               </a:r>
-              <a:endParaRPr lang="en-US" sz="1800" b="0" u="none" strike="noStrike">
-                <a:solidFill>
-                  <a:srgbClr val="FFFFFF"/>
-                </a:solidFill>
-                <a:effectLst/>
-                <a:uFillTx/>
+              <a:endParaRPr b="0" lang="en-US" sz="1800" spc="-1" strike="noStrike">
+                <a:solidFill>
+                  <a:srgbClr val="000000"/>
+                </a:solidFill>
                 <a:latin typeface="Arial"/>
               </a:endParaRPr>
             </a:p>
@@ -1163,7 +938,7 @@
       </p:grpSpPr>
       <p:sp>
         <p:nvSpPr>
-          <p:cNvPr id="13" name="title"/>
+          <p:cNvPr id="11" name="title"/>
           <p:cNvSpPr txBox="1"/>
           <p:nvPr/>
         </p:nvSpPr>
@@ -1176,33 +951,28 @@
             <a:avLst/>
           </a:prstGeom>
           <a:noFill/>
-          <a:ln w="38160">
+          <a:ln w="0">
             <a:noFill/>
           </a:ln>
         </p:spPr>
         <p:txBody>
-          <a:bodyPr lIns="90000" tIns="45000" rIns="90000" bIns="45000" anchor="t">
-            <a:spAutoFit/>
+          <a:bodyPr lIns="90000" rIns="90000" tIns="45000" bIns="45000" anchor="t">
+            <a:noAutofit/>
           </a:bodyPr>
           <a:p>
-            <a:pPr/>
-            <a:r>
-              <a:rPr lang="en-US" sz="3200" b="1" u="none" strike="noStrike">
-                <a:solidFill>
-                  <a:srgbClr val="000000"/>
-                </a:solidFill>
-                <a:effectLst/>
-                <a:uFillTx/>
+            <a:r>
+              <a:rPr b="1" lang="en-US" sz="3200" spc="-1" strike="noStrike">
+                <a:solidFill>
+                  <a:srgbClr val="000000"/>
+                </a:solidFill>
                 <a:latin typeface="Arial"/>
               </a:rPr>
               <a:t>Measured Values</a:t>
             </a:r>
-            <a:endParaRPr lang="en-US" sz="3200" b="0" u="none" strike="noStrike">
-              <a:solidFill>
-                <a:srgbClr val="000000"/>
-              </a:solidFill>
-              <a:effectLst/>
-              <a:uFillTx/>
+            <a:endParaRPr b="0" lang="en-US" sz="3200" spc="-1" strike="noStrike">
+              <a:solidFill>
+                <a:srgbClr val="000000"/>
+              </a:solidFill>
               <a:latin typeface="Arial"/>
             </a:endParaRPr>
           </a:p>
@@ -1229,37 +999,37 @@
         <a:srgbClr val="000000"/>
       </a:dk1>
       <a:lt1>
-        <a:srgbClr val="FFFFFF"/>
+        <a:srgbClr val="ffffff"/>
       </a:lt1>
       <a:dk2>
         <a:srgbClr val="000000"/>
       </a:dk2>
       <a:lt2>
-        <a:srgbClr val="FFFFFF"/>
+        <a:srgbClr val="ffffff"/>
       </a:lt2>
       <a:accent1>
-        <a:srgbClr val="18A303"/>
+        <a:srgbClr val="18a303"/>
       </a:accent1>
       <a:accent2>
-        <a:srgbClr val="0369A3"/>
+        <a:srgbClr val="0369a3"/>
       </a:accent2>
       <a:accent3>
-        <a:srgbClr val="A33E03"/>
+        <a:srgbClr val="a33e03"/>
       </a:accent3>
       <a:accent4>
-        <a:srgbClr val="8E03A3"/>
+        <a:srgbClr val="8e03a3"/>
       </a:accent4>
       <a:accent5>
-        <a:srgbClr val="C99C00"/>
+        <a:srgbClr val="c99c00"/>
       </a:accent5>
       <a:accent6>
-        <a:srgbClr val="C9211E"/>
+        <a:srgbClr val="c9211e"/>
       </a:accent6>
       <a:hlink>
-        <a:srgbClr val="0000EE"/>
+        <a:srgbClr val="0000ee"/>
       </a:hlink>
       <a:folHlink>
-        <a:srgbClr val="551A8B"/>
+        <a:srgbClr val="551a8b"/>
       </a:folHlink>
     </a:clrScheme>
     <a:fontScheme name="Office">
